--- a/Lez4.pptx
+++ b/Lez4.pptx
@@ -38,12 +38,13 @@
     <p:sldId id="295" r:id="rId32"/>
     <p:sldId id="296" r:id="rId33"/>
     <p:sldId id="297" r:id="rId34"/>
-    <p:sldId id="290" r:id="rId35"/>
-    <p:sldId id="282" r:id="rId36"/>
-    <p:sldId id="283" r:id="rId37"/>
-    <p:sldId id="284" r:id="rId38"/>
-    <p:sldId id="285" r:id="rId39"/>
-    <p:sldId id="291" r:id="rId40"/>
+    <p:sldId id="299" r:id="rId35"/>
+    <p:sldId id="290" r:id="rId36"/>
+    <p:sldId id="282" r:id="rId37"/>
+    <p:sldId id="283" r:id="rId38"/>
+    <p:sldId id="284" r:id="rId39"/>
+    <p:sldId id="285" r:id="rId40"/>
+    <p:sldId id="291" r:id="rId41"/>
   </p:sldIdLst>
   <p:sldSz cx="12192000" cy="6858000"/>
   <p:notesSz cx="6858000" cy="9144000"/>
@@ -12438,8 +12439,8 @@
         </p:nvSpPr>
         <p:spPr>
           <a:xfrm>
-            <a:off x="7270377" y="1825625"/>
-            <a:ext cx="4329952" cy="3970318"/>
+            <a:off x="6858000" y="1825625"/>
+            <a:ext cx="4742329" cy="4801314"/>
           </a:xfrm>
           <a:prstGeom prst="rect">
             <a:avLst/>
@@ -12542,14 +12543,13 @@
               <a:rPr lang="en-US" dirty="0">
                 <a:latin typeface="Consolas" panose="020B0609020204030204" pitchFamily="49" charset="0"/>
               </a:rPr>
-              <a:t>pip install </a:t>
-            </a:r>
-            <a:r>
-              <a:rPr lang="en-US" dirty="0" err="1">
-                <a:latin typeface="Consolas" panose="020B0609020204030204" pitchFamily="49" charset="0"/>
-              </a:rPr>
-              <a:t>django</a:t>
-            </a:r>
+              <a:t>pip install Django</a:t>
+            </a:r>
+          </a:p>
+          <a:p>
+            <a:pPr marL="0" indent="0">
+              <a:buNone/>
+            </a:pPr>
             <a:endParaRPr lang="en-US" dirty="0">
               <a:latin typeface="Consolas" panose="020B0609020204030204" pitchFamily="49" charset="0"/>
             </a:endParaRPr>
@@ -12593,6 +12593,11 @@
             </a:endParaRPr>
           </a:p>
           <a:p>
+            <a:endParaRPr lang="en-US" dirty="0">
+              <a:latin typeface="Consolas" panose="020B0609020204030204" pitchFamily="49" charset="0"/>
+            </a:endParaRPr>
+          </a:p>
+          <a:p>
             <a:r>
               <a:rPr lang="en-US" dirty="0">
                 <a:latin typeface="Consolas" panose="020B0609020204030204" pitchFamily="49" charset="0"/>
@@ -12605,6 +12610,11 @@
               </a:rPr>
               <a:t>mysite</a:t>
             </a:r>
+            <a:endParaRPr lang="en-US" dirty="0">
+              <a:latin typeface="Consolas" panose="020B0609020204030204" pitchFamily="49" charset="0"/>
+            </a:endParaRPr>
+          </a:p>
+          <a:p>
             <a:endParaRPr lang="en-US" dirty="0">
               <a:latin typeface="Consolas" panose="020B0609020204030204" pitchFamily="49" charset="0"/>
             </a:endParaRPr>
@@ -14565,25 +14575,13 @@
               <a:rPr lang="en-US" altLang="en-US" sz="1200" dirty="0" err="1">
                 <a:latin typeface="Consolas" panose="020B0609020204030204" pitchFamily="49" charset="0"/>
               </a:rPr>
-              <a:t>views.</a:t>
-            </a:r>
-            <a:r>
-              <a:rPr lang="en-US" altLang="en-US" sz="1200" err="1">
-                <a:latin typeface="Consolas" panose="020B0609020204030204" pitchFamily="49" charset="0"/>
-              </a:rPr>
-              <a:t>lista</a:t>
-            </a:r>
-            <a:r>
-              <a:rPr lang="en-US" altLang="en-US" sz="1200">
-                <a:latin typeface="Consolas" panose="020B0609020204030204" pitchFamily="49" charset="0"/>
-              </a:rPr>
-              <a:t>_libri, </a:t>
+              <a:t>views.lista_libri</a:t>
             </a:r>
             <a:r>
               <a:rPr lang="en-US" altLang="en-US" sz="1200" dirty="0">
                 <a:latin typeface="Consolas" panose="020B0609020204030204" pitchFamily="49" charset="0"/>
               </a:rPr>
-              <a:t>name="</a:t>
+              <a:t>, name="</a:t>
             </a:r>
             <a:r>
               <a:rPr lang="en-US" altLang="en-US" sz="1200" dirty="0" err="1">
@@ -14959,6 +14957,354 @@
   <p:cSld>
     <p:spTree>
       <p:nvGrpSpPr>
+        <p:cNvPr id="1" name="">
+          <a:extLst>
+            <a:ext uri="{FF2B5EF4-FFF2-40B4-BE49-F238E27FC236}">
+              <a16:creationId xmlns:a16="http://schemas.microsoft.com/office/drawing/2014/main" id="{414B48D8-53CD-6ED5-3E88-A1C8F1658777}"/>
+            </a:ext>
+          </a:extLst>
+        </p:cNvPr>
+        <p:cNvGrpSpPr/>
+        <p:nvPr/>
+      </p:nvGrpSpPr>
+      <p:grpSpPr>
+        <a:xfrm>
+          <a:off x="0" y="0"/>
+          <a:ext cx="0" cy="0"/>
+          <a:chOff x="0" y="0"/>
+          <a:chExt cx="0" cy="0"/>
+        </a:xfrm>
+      </p:grpSpPr>
+      <p:sp>
+        <p:nvSpPr>
+          <p:cNvPr id="2" name="Title 1">
+            <a:extLst>
+              <a:ext uri="{FF2B5EF4-FFF2-40B4-BE49-F238E27FC236}">
+                <a16:creationId xmlns:a16="http://schemas.microsoft.com/office/drawing/2014/main" id="{15AEB739-4987-7E43-7B55-67240E800BF8}"/>
+              </a:ext>
+            </a:extLst>
+          </p:cNvPr>
+          <p:cNvSpPr>
+            <a:spLocks noGrp="1"/>
+          </p:cNvSpPr>
+          <p:nvPr>
+            <p:ph type="title"/>
+          </p:nvPr>
+        </p:nvSpPr>
+        <p:spPr/>
+        <p:txBody>
+          <a:bodyPr/>
+          <a:lstStyle/>
+          <a:p>
+            <a:r>
+              <a:rPr lang="en-US" dirty="0" err="1"/>
+              <a:t>Esercizio</a:t>
+            </a:r>
+            <a:r>
+              <a:rPr lang="en-US" dirty="0"/>
+              <a:t>: </a:t>
+            </a:r>
+            <a:r>
+              <a:rPr lang="en-US" dirty="0" err="1"/>
+              <a:t>una</a:t>
+            </a:r>
+            <a:r>
+              <a:rPr lang="en-US" dirty="0"/>
+              <a:t> </a:t>
+            </a:r>
+            <a:r>
+              <a:rPr lang="en-US" dirty="0" err="1"/>
+              <a:t>piccola</a:t>
+            </a:r>
+            <a:r>
+              <a:rPr lang="en-US" dirty="0"/>
+              <a:t> </a:t>
+            </a:r>
+            <a:r>
+              <a:rPr lang="en-US" dirty="0" err="1"/>
+              <a:t>biblioteca</a:t>
+            </a:r>
+            <a:endParaRPr lang="en-US" dirty="0"/>
+          </a:p>
+        </p:txBody>
+      </p:sp>
+      <p:sp>
+        <p:nvSpPr>
+          <p:cNvPr id="3" name="Content Placeholder 2">
+            <a:extLst>
+              <a:ext uri="{FF2B5EF4-FFF2-40B4-BE49-F238E27FC236}">
+                <a16:creationId xmlns:a16="http://schemas.microsoft.com/office/drawing/2014/main" id="{AF17A233-6FB3-CB94-47BF-A7E9A23BF485}"/>
+              </a:ext>
+            </a:extLst>
+          </p:cNvPr>
+          <p:cNvSpPr>
+            <a:spLocks noGrp="1"/>
+          </p:cNvSpPr>
+          <p:nvPr>
+            <p:ph idx="1"/>
+          </p:nvPr>
+        </p:nvSpPr>
+        <p:spPr>
+          <a:xfrm>
+            <a:off x="838200" y="1825625"/>
+            <a:ext cx="5876365" cy="4351338"/>
+          </a:xfrm>
+        </p:spPr>
+        <p:txBody>
+          <a:bodyPr>
+            <a:normAutofit lnSpcReduction="10000"/>
+          </a:bodyPr>
+          <a:lstStyle/>
+          <a:p>
+            <a:pPr marL="0" indent="0">
+              <a:buNone/>
+            </a:pPr>
+            <a:r>
+              <a:rPr lang="it-IT" dirty="0"/>
+              <a:t>Crea una nuova app chiamata biblioteca e costruisci un mini-catalogo di libri.</a:t>
+            </a:r>
+          </a:p>
+          <a:p>
+            <a:pPr marL="0" indent="0">
+              <a:buNone/>
+            </a:pPr>
+            <a:r>
+              <a:rPr lang="it-IT" b="1" dirty="0"/>
+              <a:t>Cosa realizzare</a:t>
+            </a:r>
+            <a:endParaRPr lang="it-IT" dirty="0"/>
+          </a:p>
+          <a:p>
+            <a:r>
+              <a:rPr lang="it-IT" dirty="0"/>
+              <a:t>Due modelli collegati tra loro: </a:t>
+            </a:r>
+          </a:p>
+          <a:p>
+            <a:pPr lvl="1"/>
+            <a:r>
+              <a:rPr lang="it-IT" dirty="0"/>
+              <a:t>Autore, con almeno il campo nome.</a:t>
+            </a:r>
+          </a:p>
+          <a:p>
+            <a:pPr lvl="1"/>
+            <a:r>
+              <a:rPr lang="it-IT" dirty="0"/>
+              <a:t>Libro, con un titolo, un anno di pubblicazione (numero), e un campo autore collegato all'autore tramite una relazione (come abbiamo fatto con gli articoli).</a:t>
+            </a:r>
+          </a:p>
+          <a:p>
+            <a:endParaRPr lang="en-US" dirty="0"/>
+          </a:p>
+        </p:txBody>
+      </p:sp>
+      <p:sp>
+        <p:nvSpPr>
+          <p:cNvPr id="5" name="TextBox 4">
+            <a:extLst>
+              <a:ext uri="{FF2B5EF4-FFF2-40B4-BE49-F238E27FC236}">
+                <a16:creationId xmlns:a16="http://schemas.microsoft.com/office/drawing/2014/main" id="{4D561330-1C7C-15A2-1365-55D6D80F9C14}"/>
+              </a:ext>
+            </a:extLst>
+          </p:cNvPr>
+          <p:cNvSpPr txBox="1"/>
+          <p:nvPr/>
+        </p:nvSpPr>
+        <p:spPr>
+          <a:xfrm>
+            <a:off x="6642848" y="1825625"/>
+            <a:ext cx="5647764" cy="3693319"/>
+          </a:xfrm>
+          <a:prstGeom prst="rect">
+            <a:avLst/>
+          </a:prstGeom>
+          <a:noFill/>
+        </p:spPr>
+        <p:txBody>
+          <a:bodyPr wrap="square">
+            <a:spAutoFit/>
+          </a:bodyPr>
+          <a:lstStyle/>
+          <a:p>
+            <a:pPr marL="0" indent="0">
+              <a:buNone/>
+            </a:pPr>
+            <a:r>
+              <a:rPr lang="en-US" dirty="0">
+                <a:latin typeface="Consolas" panose="020B0609020204030204" pitchFamily="49" charset="0"/>
+              </a:rPr>
+              <a:t>STEP 6 . Admin</a:t>
+            </a:r>
+          </a:p>
+          <a:p>
+            <a:pPr marL="0" indent="0">
+              <a:buNone/>
+            </a:pPr>
+            <a:endParaRPr lang="en-US" dirty="0">
+              <a:latin typeface="Consolas" panose="020B0609020204030204" pitchFamily="49" charset="0"/>
+            </a:endParaRPr>
+          </a:p>
+          <a:p>
+            <a:r>
+              <a:rPr lang="en-US" dirty="0">
+                <a:latin typeface="Consolas" panose="020B0609020204030204" pitchFamily="49" charset="0"/>
+              </a:rPr>
+              <a:t>-&gt; </a:t>
+            </a:r>
+            <a:r>
+              <a:rPr lang="en-US" dirty="0" err="1">
+                <a:latin typeface="Consolas" panose="020B0609020204030204" pitchFamily="49" charset="0"/>
+              </a:rPr>
+              <a:t>Dentro</a:t>
+            </a:r>
+            <a:r>
+              <a:rPr lang="en-US" dirty="0">
+                <a:latin typeface="Consolas" panose="020B0609020204030204" pitchFamily="49" charset="0"/>
+              </a:rPr>
+              <a:t> biblioteca/admin.py</a:t>
+            </a:r>
+            <a:br>
+              <a:rPr lang="en-US" dirty="0">
+                <a:latin typeface="Consolas" panose="020B0609020204030204" pitchFamily="49" charset="0"/>
+              </a:rPr>
+            </a:br>
+            <a:r>
+              <a:rPr lang="en-US" dirty="0">
+                <a:latin typeface="Consolas" panose="020B0609020204030204" pitchFamily="49" charset="0"/>
+              </a:rPr>
+              <a:t>from </a:t>
+            </a:r>
+            <a:r>
+              <a:rPr lang="en-US" dirty="0" err="1">
+                <a:latin typeface="Consolas" panose="020B0609020204030204" pitchFamily="49" charset="0"/>
+              </a:rPr>
+              <a:t>django.contrib</a:t>
+            </a:r>
+            <a:r>
+              <a:rPr lang="en-US" dirty="0">
+                <a:latin typeface="Consolas" panose="020B0609020204030204" pitchFamily="49" charset="0"/>
+              </a:rPr>
+              <a:t> import admin</a:t>
+            </a:r>
+          </a:p>
+          <a:p>
+            <a:r>
+              <a:rPr lang="en-US" dirty="0">
+                <a:latin typeface="Consolas" panose="020B0609020204030204" pitchFamily="49" charset="0"/>
+              </a:rPr>
+              <a:t>from .models import </a:t>
+            </a:r>
+            <a:r>
+              <a:rPr lang="en-US" dirty="0" err="1">
+                <a:latin typeface="Consolas" panose="020B0609020204030204" pitchFamily="49" charset="0"/>
+              </a:rPr>
+              <a:t>Articolo</a:t>
+            </a:r>
+            <a:r>
+              <a:rPr lang="en-US" dirty="0">
+                <a:latin typeface="Consolas" panose="020B0609020204030204" pitchFamily="49" charset="0"/>
+              </a:rPr>
+              <a:t>, Autore</a:t>
+            </a:r>
+          </a:p>
+          <a:p>
+            <a:endParaRPr lang="en-US" dirty="0">
+              <a:latin typeface="Consolas" panose="020B0609020204030204" pitchFamily="49" charset="0"/>
+            </a:endParaRPr>
+          </a:p>
+          <a:p>
+            <a:r>
+              <a:rPr lang="en-US" dirty="0" err="1">
+                <a:latin typeface="Consolas" panose="020B0609020204030204" pitchFamily="49" charset="0"/>
+              </a:rPr>
+              <a:t>admin.site.register</a:t>
+            </a:r>
+            <a:r>
+              <a:rPr lang="en-US" dirty="0">
+                <a:latin typeface="Consolas" panose="020B0609020204030204" pitchFamily="49" charset="0"/>
+              </a:rPr>
+              <a:t>(</a:t>
+            </a:r>
+            <a:r>
+              <a:rPr lang="en-US" dirty="0" err="1">
+                <a:latin typeface="Consolas" panose="020B0609020204030204" pitchFamily="49" charset="0"/>
+              </a:rPr>
+              <a:t>Articolo</a:t>
+            </a:r>
+            <a:r>
+              <a:rPr lang="en-US" dirty="0">
+                <a:latin typeface="Consolas" panose="020B0609020204030204" pitchFamily="49" charset="0"/>
+              </a:rPr>
+              <a:t>)</a:t>
+            </a:r>
+          </a:p>
+          <a:p>
+            <a:r>
+              <a:rPr lang="en-US" dirty="0" err="1">
+                <a:latin typeface="Consolas" panose="020B0609020204030204" pitchFamily="49" charset="0"/>
+              </a:rPr>
+              <a:t>admin.site.register</a:t>
+            </a:r>
+            <a:r>
+              <a:rPr lang="en-US" dirty="0">
+                <a:latin typeface="Consolas" panose="020B0609020204030204" pitchFamily="49" charset="0"/>
+              </a:rPr>
+              <a:t>(Autore)</a:t>
+            </a:r>
+          </a:p>
+          <a:p>
+            <a:endParaRPr lang="en-US" dirty="0">
+              <a:latin typeface="Consolas" panose="020B0609020204030204" pitchFamily="49" charset="0"/>
+            </a:endParaRPr>
+          </a:p>
+          <a:p>
+            <a:endParaRPr lang="en-US" dirty="0"/>
+          </a:p>
+          <a:p>
+            <a:pPr marL="0" indent="0">
+              <a:buNone/>
+            </a:pPr>
+            <a:endParaRPr lang="en-US" dirty="0">
+              <a:latin typeface="Consolas" panose="020B0609020204030204" pitchFamily="49" charset="0"/>
+            </a:endParaRPr>
+          </a:p>
+          <a:p>
+            <a:pPr marL="0" indent="0">
+              <a:buNone/>
+            </a:pPr>
+            <a:endParaRPr lang="en-US" dirty="0">
+              <a:latin typeface="Consolas" panose="020B0609020204030204" pitchFamily="49" charset="0"/>
+            </a:endParaRPr>
+          </a:p>
+          <a:p>
+            <a:pPr marL="0" indent="0">
+              <a:buNone/>
+            </a:pPr>
+            <a:endParaRPr lang="en-US" dirty="0">
+              <a:latin typeface="Consolas" panose="020B0609020204030204" pitchFamily="49" charset="0"/>
+            </a:endParaRPr>
+          </a:p>
+        </p:txBody>
+      </p:sp>
+    </p:spTree>
+    <p:extLst>
+      <p:ext uri="{BB962C8B-B14F-4D97-AF65-F5344CB8AC3E}">
+        <p14:creationId xmlns:p14="http://schemas.microsoft.com/office/powerpoint/2010/main" val="180738311"/>
+      </p:ext>
+    </p:extLst>
+  </p:cSld>
+  <p:clrMapOvr>
+    <a:masterClrMapping/>
+  </p:clrMapOvr>
+</p:sld>
+</file>
+
+<file path=ppt/slides/slide35.xml><?xml version="1.0" encoding="utf-8"?>
+<p:sld xmlns:a="http://schemas.openxmlformats.org/drawingml/2006/main" xmlns:r="http://schemas.openxmlformats.org/officeDocument/2006/relationships" xmlns:p="http://schemas.openxmlformats.org/presentationml/2006/main">
+  <p:cSld>
+    <p:spTree>
+      <p:nvGrpSpPr>
         <p:cNvPr id="1" name=""/>
         <p:cNvGrpSpPr/>
         <p:nvPr/>
@@ -15098,7 +15444,7 @@
 </p:sld>
 </file>
 
-<file path=ppt/slides/slide35.xml><?xml version="1.0" encoding="utf-8"?>
+<file path=ppt/slides/slide36.xml><?xml version="1.0" encoding="utf-8"?>
 <p:sld xmlns:a="http://schemas.openxmlformats.org/drawingml/2006/main" xmlns:r="http://schemas.openxmlformats.org/officeDocument/2006/relationships" xmlns:p="http://schemas.openxmlformats.org/presentationml/2006/main">
   <p:cSld>
     <p:spTree>
@@ -15232,7 +15578,7 @@
 </p:sld>
 </file>
 
-<file path=ppt/slides/slide36.xml><?xml version="1.0" encoding="utf-8"?>
+<file path=ppt/slides/slide37.xml><?xml version="1.0" encoding="utf-8"?>
 <p:sld xmlns:a="http://schemas.openxmlformats.org/drawingml/2006/main" xmlns:r="http://schemas.openxmlformats.org/officeDocument/2006/relationships" xmlns:p="http://schemas.openxmlformats.org/presentationml/2006/main">
   <p:cSld>
     <p:spTree>
@@ -15451,7 +15797,7 @@
 </p:sld>
 </file>
 
-<file path=ppt/slides/slide37.xml><?xml version="1.0" encoding="utf-8"?>
+<file path=ppt/slides/slide38.xml><?xml version="1.0" encoding="utf-8"?>
 <p:sld xmlns:a="http://schemas.openxmlformats.org/drawingml/2006/main" xmlns:r="http://schemas.openxmlformats.org/officeDocument/2006/relationships" xmlns:p="http://schemas.openxmlformats.org/presentationml/2006/main">
   <p:cSld>
     <p:spTree>
@@ -15667,7 +16013,7 @@
 </p:sld>
 </file>
 
-<file path=ppt/slides/slide38.xml><?xml version="1.0" encoding="utf-8"?>
+<file path=ppt/slides/slide39.xml><?xml version="1.0" encoding="utf-8"?>
 <p:sld xmlns:a="http://schemas.openxmlformats.org/drawingml/2006/main" xmlns:r="http://schemas.openxmlformats.org/officeDocument/2006/relationships" xmlns:p="http://schemas.openxmlformats.org/presentationml/2006/main">
   <p:cSld>
     <p:spTree>
@@ -15832,12 +16178,12 @@
               <a:t>("</a:t>
             </a:r>
             <a:r>
-              <a:rPr lang="en-US" dirty="0" err="1"/>
+              <a:rPr lang="en-US" b="1" dirty="0" err="1"/>
               <a:t>api</a:t>
             </a:r>
             <a:r>
-              <a:rPr lang="en-US" dirty="0"/>
-              <a:t>/</a:t>
+              <a:rPr lang="en-US" b="1" dirty="0"/>
+              <a:t>/v1/</a:t>
             </a:r>
             <a:r>
               <a:rPr lang="en-US" dirty="0" err="1"/>
@@ -15987,122 +16333,6 @@
     <p:extLst>
       <p:ext uri="{BB962C8B-B14F-4D97-AF65-F5344CB8AC3E}">
         <p14:creationId xmlns:p14="http://schemas.microsoft.com/office/powerpoint/2010/main" val="831113614"/>
-      </p:ext>
-    </p:extLst>
-  </p:cSld>
-  <p:clrMapOvr>
-    <a:masterClrMapping/>
-  </p:clrMapOvr>
-</p:sld>
-</file>
-
-<file path=ppt/slides/slide39.xml><?xml version="1.0" encoding="utf-8"?>
-<p:sld xmlns:a="http://schemas.openxmlformats.org/drawingml/2006/main" xmlns:r="http://schemas.openxmlformats.org/officeDocument/2006/relationships" xmlns:p="http://schemas.openxmlformats.org/presentationml/2006/main">
-  <p:cSld>
-    <p:spTree>
-      <p:nvGrpSpPr>
-        <p:cNvPr id="1" name=""/>
-        <p:cNvGrpSpPr/>
-        <p:nvPr/>
-      </p:nvGrpSpPr>
-      <p:grpSpPr>
-        <a:xfrm>
-          <a:off x="0" y="0"/>
-          <a:ext cx="0" cy="0"/>
-          <a:chOff x="0" y="0"/>
-          <a:chExt cx="0" cy="0"/>
-        </a:xfrm>
-      </p:grpSpPr>
-      <p:sp>
-        <p:nvSpPr>
-          <p:cNvPr id="2" name="Title 1">
-            <a:extLst>
-              <a:ext uri="{FF2B5EF4-FFF2-40B4-BE49-F238E27FC236}">
-                <a16:creationId xmlns:a16="http://schemas.microsoft.com/office/drawing/2014/main" id="{E7C9BEE8-A7B2-E75F-C9F1-77C9A081296F}"/>
-              </a:ext>
-            </a:extLst>
-          </p:cNvPr>
-          <p:cNvSpPr>
-            <a:spLocks noGrp="1"/>
-          </p:cNvSpPr>
-          <p:nvPr>
-            <p:ph type="title"/>
-          </p:nvPr>
-        </p:nvSpPr>
-        <p:spPr/>
-        <p:txBody>
-          <a:bodyPr/>
-          <a:lstStyle/>
-          <a:p>
-            <a:r>
-              <a:rPr lang="en-US" dirty="0" err="1"/>
-              <a:t>Esercizio</a:t>
-            </a:r>
-            <a:r>
-              <a:rPr lang="en-US" dirty="0"/>
-              <a:t>: </a:t>
-            </a:r>
-            <a:r>
-              <a:rPr lang="en-US" dirty="0" err="1"/>
-              <a:t>aggiunta</a:t>
-            </a:r>
-            <a:r>
-              <a:rPr lang="en-US" dirty="0"/>
-              <a:t> </a:t>
-            </a:r>
-            <a:r>
-              <a:rPr lang="en-US" dirty="0" err="1"/>
-              <a:t>dei</a:t>
-            </a:r>
-            <a:r>
-              <a:rPr lang="en-US" dirty="0"/>
-              <a:t> Metodi REST </a:t>
-            </a:r>
-            <a:r>
-              <a:rPr lang="en-US" dirty="0" err="1"/>
-              <a:t>alla</a:t>
-            </a:r>
-            <a:r>
-              <a:rPr lang="en-US" dirty="0"/>
-              <a:t> </a:t>
-            </a:r>
-            <a:r>
-              <a:rPr lang="en-US" dirty="0" err="1"/>
-              <a:t>biblioteca</a:t>
-            </a:r>
-            <a:endParaRPr lang="en-US" dirty="0"/>
-          </a:p>
-        </p:txBody>
-      </p:sp>
-      <p:sp>
-        <p:nvSpPr>
-          <p:cNvPr id="3" name="Content Placeholder 2">
-            <a:extLst>
-              <a:ext uri="{FF2B5EF4-FFF2-40B4-BE49-F238E27FC236}">
-                <a16:creationId xmlns:a16="http://schemas.microsoft.com/office/drawing/2014/main" id="{ADD968B1-AEFA-BEBA-567A-4213A85164C1}"/>
-              </a:ext>
-            </a:extLst>
-          </p:cNvPr>
-          <p:cNvSpPr>
-            <a:spLocks noGrp="1"/>
-          </p:cNvSpPr>
-          <p:nvPr>
-            <p:ph idx="1"/>
-          </p:nvPr>
-        </p:nvSpPr>
-        <p:spPr/>
-        <p:txBody>
-          <a:bodyPr/>
-          <a:lstStyle/>
-          <a:p>
-            <a:endParaRPr lang="en-US" dirty="0"/>
-          </a:p>
-        </p:txBody>
-      </p:sp>
-    </p:spTree>
-    <p:extLst>
-      <p:ext uri="{BB962C8B-B14F-4D97-AF65-F5344CB8AC3E}">
-        <p14:creationId xmlns:p14="http://schemas.microsoft.com/office/powerpoint/2010/main" val="1246033228"/>
       </p:ext>
     </p:extLst>
   </p:cSld>
@@ -16255,6 +16485,122 @@
     <p:extLst>
       <p:ext uri="{BB962C8B-B14F-4D97-AF65-F5344CB8AC3E}">
         <p14:creationId xmlns:p14="http://schemas.microsoft.com/office/powerpoint/2010/main" val="3762045413"/>
+      </p:ext>
+    </p:extLst>
+  </p:cSld>
+  <p:clrMapOvr>
+    <a:masterClrMapping/>
+  </p:clrMapOvr>
+</p:sld>
+</file>
+
+<file path=ppt/slides/slide40.xml><?xml version="1.0" encoding="utf-8"?>
+<p:sld xmlns:a="http://schemas.openxmlformats.org/drawingml/2006/main" xmlns:r="http://schemas.openxmlformats.org/officeDocument/2006/relationships" xmlns:p="http://schemas.openxmlformats.org/presentationml/2006/main">
+  <p:cSld>
+    <p:spTree>
+      <p:nvGrpSpPr>
+        <p:cNvPr id="1" name=""/>
+        <p:cNvGrpSpPr/>
+        <p:nvPr/>
+      </p:nvGrpSpPr>
+      <p:grpSpPr>
+        <a:xfrm>
+          <a:off x="0" y="0"/>
+          <a:ext cx="0" cy="0"/>
+          <a:chOff x="0" y="0"/>
+          <a:chExt cx="0" cy="0"/>
+        </a:xfrm>
+      </p:grpSpPr>
+      <p:sp>
+        <p:nvSpPr>
+          <p:cNvPr id="2" name="Title 1">
+            <a:extLst>
+              <a:ext uri="{FF2B5EF4-FFF2-40B4-BE49-F238E27FC236}">
+                <a16:creationId xmlns:a16="http://schemas.microsoft.com/office/drawing/2014/main" id="{E7C9BEE8-A7B2-E75F-C9F1-77C9A081296F}"/>
+              </a:ext>
+            </a:extLst>
+          </p:cNvPr>
+          <p:cNvSpPr>
+            <a:spLocks noGrp="1"/>
+          </p:cNvSpPr>
+          <p:nvPr>
+            <p:ph type="title"/>
+          </p:nvPr>
+        </p:nvSpPr>
+        <p:spPr/>
+        <p:txBody>
+          <a:bodyPr/>
+          <a:lstStyle/>
+          <a:p>
+            <a:r>
+              <a:rPr lang="en-US" dirty="0" err="1"/>
+              <a:t>Esercizio</a:t>
+            </a:r>
+            <a:r>
+              <a:rPr lang="en-US" dirty="0"/>
+              <a:t>: </a:t>
+            </a:r>
+            <a:r>
+              <a:rPr lang="en-US" dirty="0" err="1"/>
+              <a:t>aggiunta</a:t>
+            </a:r>
+            <a:r>
+              <a:rPr lang="en-US" dirty="0"/>
+              <a:t> </a:t>
+            </a:r>
+            <a:r>
+              <a:rPr lang="en-US" dirty="0" err="1"/>
+              <a:t>dei</a:t>
+            </a:r>
+            <a:r>
+              <a:rPr lang="en-US" dirty="0"/>
+              <a:t> Metodi REST </a:t>
+            </a:r>
+            <a:r>
+              <a:rPr lang="en-US" dirty="0" err="1"/>
+              <a:t>alla</a:t>
+            </a:r>
+            <a:r>
+              <a:rPr lang="en-US" dirty="0"/>
+              <a:t> </a:t>
+            </a:r>
+            <a:r>
+              <a:rPr lang="en-US" dirty="0" err="1"/>
+              <a:t>biblioteca</a:t>
+            </a:r>
+            <a:endParaRPr lang="en-US" dirty="0"/>
+          </a:p>
+        </p:txBody>
+      </p:sp>
+      <p:sp>
+        <p:nvSpPr>
+          <p:cNvPr id="3" name="Content Placeholder 2">
+            <a:extLst>
+              <a:ext uri="{FF2B5EF4-FFF2-40B4-BE49-F238E27FC236}">
+                <a16:creationId xmlns:a16="http://schemas.microsoft.com/office/drawing/2014/main" id="{ADD968B1-AEFA-BEBA-567A-4213A85164C1}"/>
+              </a:ext>
+            </a:extLst>
+          </p:cNvPr>
+          <p:cNvSpPr>
+            <a:spLocks noGrp="1"/>
+          </p:cNvSpPr>
+          <p:nvPr>
+            <p:ph idx="1"/>
+          </p:nvPr>
+        </p:nvSpPr>
+        <p:spPr/>
+        <p:txBody>
+          <a:bodyPr/>
+          <a:lstStyle/>
+          <a:p>
+            <a:endParaRPr lang="en-US" dirty="0"/>
+          </a:p>
+        </p:txBody>
+      </p:sp>
+    </p:spTree>
+    <p:extLst>
+      <p:ext uri="{BB962C8B-B14F-4D97-AF65-F5344CB8AC3E}">
+        <p14:creationId xmlns:p14="http://schemas.microsoft.com/office/powerpoint/2010/main" val="1246033228"/>
       </p:ext>
     </p:extLst>
   </p:cSld>
